--- a/dist/초3/사회·역사/공동체와교류/초3_사회·역사_공동체와교류_01_다양한가족_학생용.pptx
+++ b/dist/초3/사회·역사/공동체와교류/초3_사회·역사_공동체와교류_01_다양한가족_학생용.pptx
@@ -119,13 +119,13 @@
   <p:extLst>
     <p:ext uri="{521415D9-36F7-43E2-AB2F-B90AF26B5E84}">
       <p14:sectionLst xmlns:p14="http://schemas.microsoft.com/office/powerpoint/2010/main">
-        <p14:section name="도입" id="{57f46aa0-a95a-c70a-ace7-aca85eb5240e}">
+        <p14:section name="도입" id="{d2c834ef-1a42-571c-357c-eb4d844177b4}">
           <p14:sldIdLst>
             <p14:sldId id="256"/>
             <p14:sldId id="257"/>
           </p14:sldIdLst>
         </p14:section>
-        <p14:section name="개념" id="{3279530f-a719-8e33-3526-1bd26fe19035}">
+        <p14:section name="개념" id="{3df095fe-8d73-9b74-7c5b-7bc04c620b59}">
           <p14:sldIdLst>
             <p14:sldId id="258"/>
             <p14:sldId id="259"/>
@@ -133,31 +133,31 @@
             <p14:sldId id="263"/>
           </p14:sldIdLst>
         </p14:section>
-        <p14:section name="연습" id="{831bd9bc-e0d2-db9c-44d3-eeb1c2108304}">
+        <p14:section name="연습" id="{640302e1-71b6-3c93-2c4e-51287d34584e}">
           <p14:sldIdLst>
             <p14:sldId id="261"/>
             <p14:sldId id="262"/>
             <p14:sldId id="264"/>
           </p14:sldIdLst>
         </p14:section>
-        <p14:section name="개념" id="{fa41a3b8-dba9-5068-6436-478c05299851}">
+        <p14:section name="개념" id="{6feb2550-2dae-7f52-6f23-337b4070b6ff}">
           <p14:sldIdLst/>
         </p14:section>
-        <p14:section name="연습" id="{9cbfd8dd-1800-c8b8-301a-2ed7fe29d2a6}">
+        <p14:section name="연습" id="{b845f626-651e-03eb-9992-5374002468c3}">
           <p14:sldIdLst/>
         </p14:section>
-        <p14:section name="확인" id="{7fb6d029-a167-d8d6-5c19-4c3d9acf3450}">
+        <p14:section name="확인" id="{886d30c7-5b84-5283-604b-97548b09e026}">
           <p14:sldIdLst>
             <p14:sldId id="265"/>
             <p14:sldId id="266"/>
           </p14:sldIdLst>
         </p14:section>
-        <p14:section name="정리" id="{219083fa-c145-8eda-2416-725d620fc132}">
+        <p14:section name="정리" id="{5fa4e8ee-e526-446b-7cc6-4ca6024784ba}">
           <p14:sldIdLst>
             <p14:sldId id="267"/>
           </p14:sldIdLst>
         </p14:section>
-        <p14:section name="보충" id="{69c17851-6820-a3e1-9ee0-94191b886362}">
+        <p14:section name="보충" id="{45a83e43-4641-9b42-563f-e48e1d18af68}">
           <p14:sldIdLst>
             <p14:sldId id="268"/>
           </p14:sldIdLst>

--- a/dist/초3/사회·역사/공동체와교류/초3_사회·역사_공동체와교류_01_다양한가족_학생용.pptx
+++ b/dist/초3/사회·역사/공동체와교류/초3_사회·역사_공동체와교류_01_다양한가족_학생용.pptx
@@ -119,13 +119,13 @@
   <p:extLst>
     <p:ext uri="{521415D9-36F7-43E2-AB2F-B90AF26B5E84}">
       <p14:sectionLst xmlns:p14="http://schemas.microsoft.com/office/powerpoint/2010/main">
-        <p14:section name="도입" id="{d2c834ef-1a42-571c-357c-eb4d844177b4}">
+        <p14:section name="도입" id="{0b1d1ee0-2bf0-5be8-7631-916acdb14721}">
           <p14:sldIdLst>
             <p14:sldId id="256"/>
             <p14:sldId id="257"/>
           </p14:sldIdLst>
         </p14:section>
-        <p14:section name="개념" id="{3df095fe-8d73-9b74-7c5b-7bc04c620b59}">
+        <p14:section name="개념" id="{3c006b8f-242f-7f8a-7cb1-87b1bbb5cbc9}">
           <p14:sldIdLst>
             <p14:sldId id="258"/>
             <p14:sldId id="259"/>
@@ -133,31 +133,31 @@
             <p14:sldId id="263"/>
           </p14:sldIdLst>
         </p14:section>
-        <p14:section name="연습" id="{640302e1-71b6-3c93-2c4e-51287d34584e}">
+        <p14:section name="연습" id="{2912d424-a91f-0c0d-6de1-0ff94c652e47}">
           <p14:sldIdLst>
             <p14:sldId id="261"/>
             <p14:sldId id="262"/>
             <p14:sldId id="264"/>
           </p14:sldIdLst>
         </p14:section>
-        <p14:section name="개념" id="{6feb2550-2dae-7f52-6f23-337b4070b6ff}">
+        <p14:section name="개념" id="{a220ec44-9c0c-45e0-66df-5d02d83c5cd4}">
           <p14:sldIdLst/>
         </p14:section>
-        <p14:section name="연습" id="{b845f626-651e-03eb-9992-5374002468c3}">
+        <p14:section name="연습" id="{2223c950-ce9d-c481-d180-eb32469b0187}">
           <p14:sldIdLst/>
         </p14:section>
-        <p14:section name="확인" id="{886d30c7-5b84-5283-604b-97548b09e026}">
+        <p14:section name="확인" id="{24d1d927-d8bc-4808-a834-e656e2b79b46}">
           <p14:sldIdLst>
             <p14:sldId id="265"/>
             <p14:sldId id="266"/>
           </p14:sldIdLst>
         </p14:section>
-        <p14:section name="정리" id="{5fa4e8ee-e526-446b-7cc6-4ca6024784ba}">
+        <p14:section name="정리" id="{766895b6-76db-7f17-ac03-165948b73224}">
           <p14:sldIdLst>
             <p14:sldId id="267"/>
           </p14:sldIdLst>
         </p14:section>
-        <p14:section name="보충" id="{45a83e43-4641-9b42-563f-e48e1d18af68}">
+        <p14:section name="보충" id="{327657bd-5c9c-da22-6b49-668489dfcc2d}">
           <p14:sldIdLst>
             <p14:sldId id="268"/>
           </p14:sldIdLst>
